--- a/Uber_Equity_Research_Stock_Pitch.pptx
+++ b/Uber_Equity_Research_Stock_Pitch.pptx
@@ -1723,7 +1723,7 @@
                 <a:ea typeface="Aptos" pitchFamily="34" charset="-122"/>
                 <a:cs typeface="Aptos" pitchFamily="34" charset="-120"/>
               </a:rPr>
-              <a:t>Scale is real. Is the price right?</a:t>
+              <a:t>Valuation and investment outlook</a:t>
             </a:r>
             <a:endParaRPr lang="en-US" sz="2900" dirty="0"/>
           </a:p>
@@ -2158,7 +2158,7 @@
                 <a:ea typeface="Aptos" pitchFamily="34" charset="-122"/>
                 <a:cs typeface="Aptos" pitchFamily="34" charset="-120"/>
               </a:rPr>
-              <a:t>As-of: October 21, 2026 close  |  Published October 22, 2026</a:t>
+              <a:t>As of October 21, 2026 close. Published October 22, 2026</a:t>
             </a:r>
             <a:endParaRPr lang="en-US" sz="1100" dirty="0"/>
           </a:p>
@@ -2653,7 +2653,7 @@
                 <a:ea typeface="Aptos" pitchFamily="34" charset="-122"/>
                 <a:cs typeface="Aptos" pitchFamily="34" charset="-120"/>
               </a:rPr>
-              <a:t>Reported accounting presentation</a:t>
+              <a:t>GAAP accounting basis</a:t>
             </a:r>
             <a:endParaRPr lang="en-US" sz="900" dirty="0"/>
           </a:p>
@@ -2795,7 +2795,7 @@
                 <a:ea typeface="Aptos" pitchFamily="34" charset="-122"/>
                 <a:cs typeface="Aptos" pitchFamily="34" charset="-120"/>
               </a:rPr>
-              <a:t>Different from unlevered DCF FCF</a:t>
+              <a:t>Reported FCF differs from unlevered DCF cash flow</a:t>
             </a:r>
             <a:endParaRPr lang="en-US" sz="900" dirty="0"/>
           </a:p>
@@ -3210,7 +3210,7 @@
                 <a:ea typeface="Aptos" pitchFamily="34" charset="-122"/>
                 <a:cs typeface="Aptos" pitchFamily="34" charset="-120"/>
               </a:rPr>
-              <a:t>Reported revenue growth was affected by UK Mobility business-model changes (~$1.1B quarterly effect). Sources: Uber 2025 10-K and Q2 2026 results.</a:t>
+              <a:t>UK Mobility business-model changes affected reported revenue growth (~$1.1B quarterly effect). Sources: Uber 2025 10-K and Q2 2026 results.</a:t>
             </a:r>
             <a:endParaRPr lang="en-US" sz="800" dirty="0"/>
           </a:p>
@@ -3320,7 +3320,7 @@
                 <a:ea typeface="Aptos" pitchFamily="34" charset="-122"/>
                 <a:cs typeface="Aptos" pitchFamily="34" charset="-120"/>
               </a:rPr>
-              <a:t>The core investment debate</a:t>
+              <a:t>Investment thesis and risks</a:t>
             </a:r>
             <a:endParaRPr lang="en-US" sz="2600" dirty="0"/>
           </a:p>
@@ -3485,7 +3485,7 @@
                 <a:ea typeface="Aptos" pitchFamily="34" charset="-122"/>
                 <a:cs typeface="Aptos" pitchFamily="34" charset="-120"/>
               </a:rPr>
-              <a:t>UPSIDE  /  AGGREGATION POWER</a:t>
+              <a:t>UPSIDE  /  NETWORK SCALE</a:t>
             </a:r>
             <a:endParaRPr lang="en-US" sz="1500" dirty="0"/>
           </a:p>
@@ -3524,7 +3524,7 @@
                 <a:ea typeface="Aptos" pitchFamily="34" charset="-122"/>
                 <a:cs typeface="Aptos" pitchFamily="34" charset="-120"/>
               </a:rPr>
-              <a:t>Uber combines a large demand network, driver supply, delivery density, and consumer engagement. If bookings remain strong and operating leverage expands, free cash generation may grow faster than sales.</a:t>
+              <a:t>Uber combines a large customer base and driver network with dense delivery coverage and frequent consumer use. Strong bookings and operating leverage could let free cash flow grow faster than revenue.</a:t>
             </a:r>
             <a:endParaRPr lang="en-US" sz="1200" dirty="0"/>
           </a:p>
@@ -3588,7 +3588,7 @@
                 <a:ea typeface="Aptos" pitchFamily="34" charset="-122"/>
                 <a:cs typeface="Aptos" pitchFamily="34" charset="-120"/>
               </a:rPr>
-              <a:t>DOWNSIDE  /  DISINTERMEDIATION</a:t>
+              <a:t>DOWNSIDE  /  MARKETPLACE RISK</a:t>
             </a:r>
             <a:endParaRPr lang="en-US" sz="1500" dirty="0"/>
           </a:p>
@@ -3627,7 +3627,7 @@
                 <a:ea typeface="Aptos" pitchFamily="34" charset="-122"/>
                 <a:cs typeface="Aptos" pitchFamily="34" charset="-120"/>
               </a:rPr>
-              <a:t>Autonomous fleets might bypass the marketplace. Insurance, driver economics, regulation and spending on autonomy could prevent margin gains. An acquisition may increase leverage.</a:t>
+              <a:t>Autonomous fleets could bypass Uber. Insurance costs, driver economics, regulation and autonomy spending could limit margin gains. Acquisitions could increase leverage.</a:t>
             </a:r>
             <a:endParaRPr lang="en-US" sz="1200" dirty="0"/>
           </a:p>
@@ -3691,7 +3691,7 @@
                 <a:ea typeface="Aptos" pitchFamily="34" charset="-122"/>
                 <a:cs typeface="Aptos" pitchFamily="34" charset="-120"/>
               </a:rPr>
-              <a:t>THE QUESTION</a:t>
+              <a:t>VALUATION QUESTION</a:t>
             </a:r>
             <a:endParaRPr lang="en-US" sz="1300" dirty="0"/>
           </a:p>
@@ -3730,7 +3730,7 @@
                 <a:ea typeface="Aptos" pitchFamily="34" charset="-122"/>
                 <a:cs typeface="Aptos" pitchFamily="34" charset="-120"/>
               </a:rPr>
-              <a:t>Is durable owner cash flow worth more than $67.62 per share?</a:t>
+              <a:t>Can future cash flow support a value above $67.62 per share?</a:t>
             </a:r>
             <a:endParaRPr lang="en-US" sz="2100" dirty="0"/>
           </a:p>
@@ -3769,7 +3769,7 @@
                 <a:ea typeface="Aptos" pitchFamily="34" charset="-122"/>
                 <a:cs typeface="Aptos" pitchFamily="34" charset="-120"/>
               </a:rPr>
-              <a:t>Investment thesis is conditional, not a claim that current market expectations are necessarily incorrect.</a:t>
+              <a:t>Valuation depends on the growth, margin and risk assumptions in the model.</a:t>
             </a:r>
             <a:endParaRPr lang="en-US" sz="800" dirty="0"/>
           </a:p>
@@ -3879,7 +3879,7 @@
                 <a:ea typeface="Aptos" pitchFamily="34" charset="-122"/>
                 <a:cs typeface="Aptos" pitchFamily="34" charset="-120"/>
               </a:rPr>
-              <a:t>Base case: scale and expanding operating margin</a:t>
+              <a:t>Base operating forecast</a:t>
             </a:r>
             <a:endParaRPr lang="en-US" sz="2600" dirty="0"/>
           </a:p>
@@ -5308,7 +5308,7 @@
                 <a:ea typeface="Aptos" pitchFamily="34" charset="-122"/>
                 <a:cs typeface="Aptos" pitchFamily="34" charset="-120"/>
               </a:rPr>
-              <a:t>FY2025 reported; FY2026–FY2030 analyst forecasts. Model separates bookings growth, take rate/revenue mix and EBIT margin assumptions.</a:t>
+              <a:t>FY2025 reported. FY2026–FY2030 analyst forecasts use separate assumptions for bookings growth, take rate/revenue mix and EBIT margin.</a:t>
             </a:r>
             <a:endParaRPr lang="en-US" sz="800" dirty="0"/>
           </a:p>
@@ -5418,7 +5418,7 @@
                 <a:ea typeface="Aptos" pitchFamily="34" charset="-122"/>
                 <a:cs typeface="Aptos" pitchFamily="34" charset="-120"/>
               </a:rPr>
-              <a:t>DCF bridge: $77.02 intrinsic value per share</a:t>
+              <a:t>DCF valuation: $77.02 per share</a:t>
             </a:r>
             <a:endParaRPr lang="en-US" sz="2600" dirty="0"/>
           </a:p>
@@ -6193,7 +6193,7 @@
                 <a:ea typeface="Aptos" pitchFamily="34" charset="-122"/>
                 <a:cs typeface="Aptos" pitchFamily="34" charset="-120"/>
               </a:rPr>
-              <a:t>MODEL VULNERABILITY</a:t>
+              <a:t>TERMINAL VALUE SHARE</a:t>
             </a:r>
             <a:endParaRPr lang="en-US" sz="1200" dirty="0"/>
           </a:p>
@@ -6271,7 +6271,7 @@
                 <a:ea typeface="Aptos" pitchFamily="34" charset="-122"/>
                 <a:cs typeface="Aptos" pitchFamily="34" charset="-120"/>
               </a:rPr>
-              <a:t>of enterprise value comes from the terminal component</a:t>
+              <a:t>of enterprise value comes from terminal value</a:t>
             </a:r>
             <a:endParaRPr lang="en-US" sz="1200" dirty="0"/>
           </a:p>
@@ -6310,7 +6310,7 @@
                 <a:ea typeface="Aptos" pitchFamily="34" charset="-122"/>
                 <a:cs typeface="Aptos" pitchFamily="34" charset="-120"/>
               </a:rPr>
-              <a:t>Base: 10.0% WACC, 2.75% perpetuity growth, 25% tax, 2,091M diluted shares; valuation uses June 30 balance-sheet data.</a:t>
+              <a:t>Base: 10.0% WACC, 2.75% perpetuity growth, 25% tax and 2,091M diluted shares. Valuation uses June 30 balance-sheet data.</a:t>
             </a:r>
             <a:endParaRPr lang="en-US" sz="800" dirty="0"/>
           </a:p>
@@ -6420,7 +6420,7 @@
                 <a:ea typeface="Aptos" pitchFamily="34" charset="-122"/>
                 <a:cs typeface="Aptos" pitchFamily="34" charset="-120"/>
               </a:rPr>
-              <a:t>Outcomes are asymmetric—but highly assumption-sensitive</a:t>
+              <a:t>Bear, base and bull valuations</a:t>
             </a:r>
             <a:endParaRPr lang="en-US" sz="2600" dirty="0"/>
           </a:p>
@@ -7096,7 +7096,7 @@
                 <a:ea typeface="Aptos" pitchFamily="34" charset="-122"/>
                 <a:cs typeface="Aptos" pitchFamily="34" charset="-120"/>
               </a:rPr>
-              <a:t>Bear / Base / Bull WACC: 11% / 10% / 9%    |    2030 EBIT margin: 14.0% / 17.25% / 20.5%</a:t>
+              <a:t>Bear / Base / Bull WACC: 11% / 10% / 9%. 2030 EBIT margin: 14.0% / 17.25% / 20.5%</a:t>
             </a:r>
             <a:endParaRPr lang="en-US" sz="1100" dirty="0"/>
           </a:p>
@@ -7135,7 +7135,7 @@
                 <a:ea typeface="Aptos" pitchFamily="34" charset="-122"/>
                 <a:cs typeface="Aptos" pitchFamily="34" charset="-120"/>
               </a:rPr>
-              <a:t>Hypothetical M&amp;A net-present-value adjustments in bear/base/bull: −$5B / $0 / +$5B. These are not forecast transaction synergies.</a:t>
+              <a:t>Bear/base/bull include hypothetical M&amp;A net-present-value adjustments of −$5B / $0 / +$5B, with no forecast of transaction synergies.</a:t>
             </a:r>
             <a:endParaRPr lang="en-US" sz="800" dirty="0"/>
           </a:p>
@@ -7245,7 +7245,7 @@
                 <a:ea typeface="Aptos" pitchFamily="34" charset="-122"/>
                 <a:cs typeface="Aptos" pitchFamily="34" charset="-120"/>
               </a:rPr>
-              <a:t>Trading multiples: a cross-check, not the thesis</a:t>
+              <a:t>Peer trading multiples</a:t>
             </a:r>
             <a:endParaRPr lang="en-US" sz="2600" dirty="0"/>
           </a:p>
@@ -8134,7 +8134,7 @@
                 <a:ea typeface="Aptos" pitchFamily="34" charset="-122"/>
                 <a:cs typeface="Aptos" pitchFamily="34" charset="-120"/>
               </a:rPr>
-              <a:t>Caution: growth, leverage, accounting and business models differ materially across the peer set.</a:t>
+              <a:t>Peer growth, leverage, accounting and business models differ materially.</a:t>
             </a:r>
             <a:endParaRPr lang="en-US" sz="1200" dirty="0"/>
           </a:p>
@@ -8173,7 +8173,7 @@
                 <a:ea typeface="Aptos" pitchFamily="34" charset="-122"/>
                 <a:cs typeface="Aptos" pitchFamily="34" charset="-120"/>
               </a:rPr>
-              <a:t>FY2025 non-GAAP adjusted EBITDA; October 21 market closes; June 30, 2026 balance sheets. Directional peer check only.</a:t>
+              <a:t>FY2025 non-GAAP adjusted EBITDA, October 21 market closes and June 30, 2026 balance sheets.</a:t>
             </a:r>
             <a:endParaRPr lang="en-US" sz="800" dirty="0"/>
           </a:p>
@@ -8283,7 +8283,7 @@
                 <a:ea typeface="Aptos" pitchFamily="34" charset="-122"/>
                 <a:cs typeface="Aptos" pitchFamily="34" charset="-120"/>
               </a:rPr>
-              <a:t>Delivery Hero: an event risk the base case cannot ignore</a:t>
+              <a:t>Delivery Hero acquisition risk</a:t>
             </a:r>
             <a:endParaRPr lang="en-US" sz="2600" dirty="0"/>
           </a:p>
@@ -8874,7 +8874,7 @@
                 <a:ea typeface="Aptos" pitchFamily="34" charset="-122"/>
                 <a:cs typeface="Aptos" pitchFamily="34" charset="-120"/>
               </a:rPr>
-              <a:t>VALUATION DISCIPLINE</a:t>
+              <a:t>BASE-CASE TREATMENT</a:t>
             </a:r>
             <a:endParaRPr lang="en-US" sz="1400" dirty="0"/>
           </a:p>
@@ -8913,7 +8913,7 @@
                 <a:ea typeface="Aptos" pitchFamily="34" charset="-122"/>
                 <a:cs typeface="Aptos" pitchFamily="34" charset="-120"/>
               </a:rPr>
-              <a:t>Base-case merger overlay: $0; no unverified combined-company forecast</a:t>
+              <a:t>Base-case merger adjustment: $0. No combined-company forecast.</a:t>
             </a:r>
             <a:endParaRPr lang="en-US" sz="1700" dirty="0"/>
           </a:p>
@@ -8952,7 +8952,7 @@
                 <a:ea typeface="Aptos" pitchFamily="34" charset="-122"/>
                 <a:cs typeface="Aptos" pitchFamily="34" charset="-120"/>
               </a:rPr>
-              <a:t>NEXT DATES TO WATCH</a:t>
+              <a:t>UPCOMING DATES</a:t>
             </a:r>
             <a:endParaRPr lang="en-US" sz="1700" dirty="0"/>
           </a:p>
@@ -9016,7 +9016,7 @@
                 <a:ea typeface="Aptos" pitchFamily="34" charset="-122"/>
                 <a:cs typeface="Aptos" pitchFamily="34" charset="-120"/>
               </a:rPr>
-              <a:t>NOV 4  •  Q3 EARNINGS</a:t>
+              <a:t>NOV 4: Q3 EARNINGS</a:t>
             </a:r>
             <a:endParaRPr lang="en-US" sz="1100" dirty="0"/>
           </a:p>
@@ -9080,7 +9080,7 @@
                 <a:ea typeface="Aptos" pitchFamily="34" charset="-122"/>
                 <a:cs typeface="Aptos" pitchFamily="34" charset="-120"/>
               </a:rPr>
-              <a:t>NOV 5  •  TENDER DEADLINE</a:t>
+              <a:t>NOV 5: TENDER DEADLINE</a:t>
             </a:r>
             <a:endParaRPr lang="en-US" sz="1100" dirty="0"/>
           </a:p>
@@ -9119,7 +9119,7 @@
                 <a:ea typeface="Aptos" pitchFamily="34" charset="-122"/>
                 <a:cs typeface="Aptos" pitchFamily="34" charset="-120"/>
               </a:rPr>
-              <a:t>July 16 announced bid; August 27 offer-document update. Transaction may alter capital structure and financial investment treatment.</a:t>
+              <a:t>Bid announced July 16, with an offer-document update August 27. The transaction may change capital structure and financial investment treatment.</a:t>
             </a:r>
             <a:endParaRPr lang="en-US" sz="800" dirty="0"/>
           </a:p>
@@ -9229,7 +9229,7 @@
                 <a:ea typeface="Aptos" pitchFamily="34" charset="-122"/>
                 <a:cs typeface="Aptos" pitchFamily="34" charset="-120"/>
               </a:rPr>
-              <a:t>Conclusion: promising business, limited margin of safety</a:t>
+              <a:t>Recommendation: watchlist / neutral</a:t>
             </a:r>
             <a:endParaRPr lang="en-US" sz="2600" dirty="0"/>
           </a:p>
@@ -9534,7 +9534,7 @@
                 <a:ea typeface="Aptos" pitchFamily="34" charset="-122"/>
                 <a:cs typeface="Aptos" pitchFamily="34" charset="-120"/>
               </a:rPr>
-              <a:t>What would change the stance?</a:t>
+              <a:t>What would change my view?</a:t>
             </a:r>
             <a:endParaRPr lang="en-US" sz="1900" dirty="0"/>
           </a:p>
@@ -9726,7 +9726,7 @@
                 <a:ea typeface="Aptos" pitchFamily="34" charset="-122"/>
                 <a:cs typeface="Aptos" pitchFamily="34" charset="-120"/>
               </a:rPr>
-              <a:t>Delivery Hero cash-flow/leverage underwriting</a:t>
+              <a:t>Clarity on Delivery Hero cash flow and leverage</a:t>
             </a:r>
             <a:endParaRPr lang="en-US" sz="1400" dirty="0"/>
           </a:p>
@@ -9790,7 +9790,7 @@
                 <a:ea typeface="Aptos" pitchFamily="34" charset="-122"/>
                 <a:cs typeface="Aptos" pitchFamily="34" charset="-120"/>
               </a:rPr>
-              <a:t>Visibility into autonomous-vehicle unit economics</a:t>
+              <a:t>Evidence on autonomous-vehicle unit economics</a:t>
             </a:r>
             <a:endParaRPr lang="en-US" sz="1400" dirty="0"/>
           </a:p>
@@ -9854,7 +9854,7 @@
                 <a:ea typeface="Aptos" pitchFamily="34" charset="-122"/>
                 <a:cs typeface="Aptos" pitchFamily="34" charset="-120"/>
               </a:rPr>
-              <a:t>FULL SOURCE AUDIT, ASSUMPTIONS AND SENSITIVITIES INCLUDED IN THE ACCOMPANYING EXCEL MODEL</a:t>
+              <a:t>EXCEL MODEL INCLUDES SOURCES, ASSUMPTIONS AND SENSITIVITIES</a:t>
             </a:r>
             <a:endParaRPr lang="en-US" sz="1000" dirty="0"/>
           </a:p>
